--- a/ppt/SARATHI_SIH26037_Idea_Submission.pptx
+++ b/ppt/SARATHI_SIH26037_Idea_Submission.pptx
@@ -8605,7 +8605,7 @@
                 </a:solidFill>
                 <a:latin typeface="Arial"/>
               </a:rPr>
-              <a:t>• Automated tests, including behavioural regressions, run in CI</a:t>
+              <a:t>• 88 automated tests, including behavioural regressions</a:t>
             </a:r>
           </a:p>
           <a:p>
